--- a/SlideThuyetTrinh_RBA_MLP_Fuzzy.pptx
+++ b/SlideThuyetTrinh_RBA_MLP_Fuzzy.pptx
@@ -6303,7 +6303,7 @@
                 <a:ea typeface="Cambria" pitchFamily="34" charset="-122"/>
                 <a:cs typeface="Cambria" pitchFamily="34" charset="-120"/>
               </a:rPr>
-              <a:t>87.7%</a:t>
+              <a:t>87.8%</a:t>
             </a:r>
             <a:endParaRPr lang="en-US" sz="2700" dirty="0"/>
           </a:p>
@@ -6408,7 +6408,7 @@
                 <a:ea typeface="Cambria" pitchFamily="34" charset="-122"/>
                 <a:cs typeface="Cambria" pitchFamily="34" charset="-120"/>
               </a:rPr>
-              <a:t>21.9%</a:t>
+              <a:t>21.8%</a:t>
             </a:r>
             <a:endParaRPr lang="en-US" sz="2700" dirty="0"/>
           </a:p>
@@ -6513,7 +6513,7 @@
                 <a:ea typeface="Cambria" pitchFamily="34" charset="-122"/>
                 <a:cs typeface="Cambria" pitchFamily="34" charset="-120"/>
               </a:rPr>
-              <a:t>79.0%</a:t>
+              <a:t>79.3%</a:t>
             </a:r>
             <a:endParaRPr lang="en-US" sz="2700" dirty="0"/>
           </a:p>
@@ -6618,7 +6618,7 @@
                 <a:ea typeface="Cambria" pitchFamily="34" charset="-122"/>
                 <a:cs typeface="Cambria" pitchFamily="34" charset="-120"/>
               </a:rPr>
-              <a:t>11.2%</a:t>
+              <a:t>11.3%</a:t>
             </a:r>
             <a:endParaRPr lang="en-US" sz="2700" dirty="0"/>
           </a:p>
@@ -6723,7 +6723,7 @@
                 <a:ea typeface="Cambria" pitchFamily="34" charset="-122"/>
                 <a:cs typeface="Cambria" pitchFamily="34" charset="-120"/>
               </a:rPr>
-              <a:t>84.5%</a:t>
+              <a:t>84.3%</a:t>
             </a:r>
             <a:endParaRPr lang="en-US" sz="2700" dirty="0"/>
           </a:p>
@@ -6828,7 +6828,7 @@
                 <a:ea typeface="Cambria" pitchFamily="34" charset="-122"/>
                 <a:cs typeface="Cambria" pitchFamily="34" charset="-120"/>
               </a:rPr>
-              <a:t>19.7%</a:t>
+              <a:t>20.0%</a:t>
             </a:r>
             <a:endParaRPr lang="en-US" sz="2700" dirty="0"/>
           </a:p>
@@ -6909,7 +6909,7 @@
                 <a:ea typeface="Calibri" pitchFamily="34" charset="-122"/>
                 <a:cs typeface="Calibri" pitchFamily="34" charset="-120"/>
               </a:rPr>
-              <a:t>Recall cao (84.5%) — bắt được phần lớn tấn công thật.  Precision thấp (11.2%) — hệ quả của dữ liệu mất cân bằng (~3% dương) ở ngưỡng mặc định 0.5. Đổi ngưỡng theo F1 (0.829): Precision → 27.8%, F1 → 0.327.</a:t>
+              <a:t>Recall cao (84.3%) — bắt được phần lớn tấn công thật.  Precision thấp (11.3%) — hệ quả của dữ liệu mất cân bằng (~3% dương) ở ngưỡng mặc định 0.5. Đổi ngưỡng theo F1 (0.844): Precision → 28.9%, F1 → 0.324.</a:t>
             </a:r>
             <a:endParaRPr lang="en-US" sz="1400" dirty="0"/>
           </a:p>
@@ -7214,7 +7214,7 @@
                 <a:ea typeface="Calibri" pitchFamily="34" charset="-122"/>
                 <a:cs typeface="Calibri" pitchFamily="34" charset="-120"/>
               </a:rPr>
-              <a:t>Train loss giảm ổn định, Val AUPRC/AUROC hội tụ trước epoch 30 (early stopping kích hoạt) → mô hình không overfitting. AUC-ROC = 0.877 cho thấy khả năng phân biệt tốt; đường Precision-Recall thấp hơn nhiều so với ROC — đúng đặc trưng của bài toán có tỷ lệ dương chỉ ~3%, nơi AUPRC phản ánh độ khó thực tế rõ hơn AUROC.</a:t>
+              <a:t>Train loss giảm ổn định, Val AUPRC/AUROC hội tụ trước epoch 30 (early stopping kích hoạt) → mô hình không overfitting. AUC-ROC = 0.878 cho thấy khả năng phân biệt tốt; đường Precision-Recall thấp hơn nhiều so với ROC — đúng đặc trưng của bài toán có tỷ lệ dương chỉ ~3%, nơi AUPRC phản ánh độ khó thực tế rõ hơn AUROC.</a:t>
             </a:r>
             <a:endParaRPr lang="en-US" sz="1400" dirty="0"/>
           </a:p>
@@ -7397,7 +7397,7 @@
         </p:nvSpPr>
         <p:spPr>
           <a:xfrm>
-            <a:off x="822960" y="2011680"/>
+            <a:off x="822960" y="1965960"/>
             <a:ext cx="4846320" cy="457200"/>
           </a:xfrm>
           <a:prstGeom prst="rect">
@@ -7414,7 +7414,7 @@
               <a:buNone/>
             </a:pPr>
             <a:r>
-              <a:rPr lang="en-US" sz="1550" b="1" dirty="0">
+              <a:rPr lang="en-US" sz="1450" b="1" dirty="0">
                 <a:solidFill>
                   <a:srgbClr val="0CA30C"/>
                 </a:solidFill>
@@ -7422,9 +7422,9 @@
                 <a:ea typeface="Cambria" pitchFamily="34" charset="-122"/>
                 <a:cs typeface="Cambria" pitchFamily="34" charset="-120"/>
               </a:rPr>
-              <a:t>✓  ĐÃ PHÁT HIỆN &amp; KHẮC PHỤC</a:t>
-            </a:r>
-            <a:endParaRPr lang="en-US" sz="1550" dirty="0"/>
+              <a:t>✓  ĐÃ PHÁT HIỆN &amp; KHẮC PHỤC (2 lỗi)</a:t>
+            </a:r>
+            <a:endParaRPr lang="en-US" sz="1450" dirty="0"/>
           </a:p>
         </p:txBody>
       </p:sp>
@@ -7436,8 +7436,8 @@
         </p:nvSpPr>
         <p:spPr>
           <a:xfrm>
-            <a:off x="822960" y="2560320"/>
-            <a:ext cx="4846320" cy="3383280"/>
+            <a:off x="822960" y="2468880"/>
+            <a:ext cx="4846320" cy="3474720"/>
           </a:xfrm>
           <a:prstGeom prst="rect">
             <a:avLst/>
@@ -7451,16 +7451,16 @@
           <a:p>
             <a:pPr marL="342900" indent="-342900">
               <a:lnSpc>
-                <a:spcPts val="1800"/>
+                <a:spcPts val="1600"/>
               </a:lnSpc>
               <a:spcAft>
-                <a:spcPts val="1000"/>
+                <a:spcPts val="800"/>
               </a:spcAft>
               <a:buSzPct val="100000"/>
               <a:buChar char="•"/>
             </a:pPr>
             <a:r>
-              <a:rPr lang="en-US" sz="1300" dirty="0">
+              <a:rPr lang="en-US" sz="1200" dirty="0">
                 <a:solidFill>
                   <a:srgbClr val="232323"/>
                 </a:solidFill>
@@ -7468,23 +7468,23 @@
                 <a:ea typeface="Calibri" pitchFamily="34" charset="-122"/>
                 <a:cs typeface="Calibri" pitchFamily="34" charset="-120"/>
               </a:rPr>
-              <a:t>Hàm xmin/xmax trong fuzzy_mamdani.py từng tính lại theo từng batch — méo kết quả khi suy luận trên 1 dòng đơn lẻ (real-time).</a:t>
-            </a:r>
-            <a:endParaRPr lang="en-US" sz="1300" dirty="0"/>
+              <a:t>xmin/xmax trong fuzzy_mamdani.py từng tính lại theo batch — méo kết quả khi suy luận 1 dòng đơn lẻ. Đã sửa: lưu cố định từ fit().</a:t>
+            </a:r>
+            <a:endParaRPr lang="en-US" sz="1200" dirty="0"/>
           </a:p>
           <a:p>
             <a:pPr marL="342900" indent="-342900">
               <a:lnSpc>
-                <a:spcPts val="1800"/>
+                <a:spcPts val="1600"/>
               </a:lnSpc>
               <a:spcAft>
-                <a:spcPts val="1000"/>
+                <a:spcPts val="800"/>
               </a:spcAft>
               <a:buSzPct val="100000"/>
               <a:buChar char="•"/>
             </a:pPr>
             <a:r>
-              <a:rPr lang="en-US" sz="1300" dirty="0">
+              <a:rPr lang="en-US" sz="1200" dirty="0">
                 <a:solidFill>
                   <a:srgbClr val="232323"/>
                 </a:solidFill>
@@ -7492,20 +7492,20 @@
                 <a:ea typeface="Calibri" pitchFamily="34" charset="-122"/>
                 <a:cs typeface="Calibri" pitchFamily="34" charset="-120"/>
               </a:rPr>
-              <a:t>Đã sửa: lưu xmin/xmax toàn cục từ fit(), dùng cố định trong transform().</a:t>
-            </a:r>
-            <a:endParaRPr lang="en-US" sz="1300" dirty="0"/>
+              <a:t>Leakage thống kê toàn cục: median RTT và độ hiếm Country/ASN trước đây tính trên CẢ dữ liệu (gồm val/test). Đã sửa: fit_global_stats() chỉ trên train.</a:t>
+            </a:r>
+            <a:endParaRPr lang="en-US" sz="1200" dirty="0"/>
           </a:p>
           <a:p>
             <a:pPr marL="342900" indent="-342900">
               <a:lnSpc>
-                <a:spcPts val="1800"/>
+                <a:spcPts val="1600"/>
               </a:lnSpc>
               <a:buSzPct val="100000"/>
               <a:buChar char="•"/>
             </a:pPr>
             <a:r>
-              <a:rPr lang="en-US" sz="1300" dirty="0">
+              <a:rPr lang="en-US" sz="1200" dirty="0">
                 <a:solidFill>
                   <a:srgbClr val="232323"/>
                 </a:solidFill>
@@ -7513,9 +7513,9 @@
                 <a:ea typeface="Calibri" pitchFamily="34" charset="-122"/>
                 <a:cs typeface="Calibri" pitchFamily="34" charset="-120"/>
               </a:rPr>
-              <a:t>Huấn luyện lại — kiểm chứng bằng demo: kịch bản rủi ro cao/thấp cho xác suất 76.9% / 26.3%, tách biệt rõ ràng.</a:t>
-            </a:r>
-            <a:endParaRPr lang="en-US" sz="1300" dirty="0"/>
+              <a:t>Đã huấn luyện lại sau cả 2 lần sửa — kiểm chứng bằng demo inference.py cho kết quả tách biệt hợp lý giữa 2 kịch bản.</a:t>
+            </a:r>
+            <a:endParaRPr lang="en-US" sz="1200" dirty="0"/>
           </a:p>
         </p:txBody>
       </p:sp>
@@ -7625,7 +7625,7 @@
                 <a:ea typeface="Calibri" pitchFamily="34" charset="-122"/>
                 <a:cs typeface="Calibri" pitchFamily="34" charset="-120"/>
               </a:rPr>
-              <a:t>Precision thấp (11.2%) ở ngưỡng 0.5. Đổi ngưỡng F1 (0.829) → Precision 27.8%, nhưng Recall giảm còn 39.8% — vẫn cần đánh đổi theo mục tiêu thực tế.</a:t>
+              <a:t>Precision thấp (11.3%) ở ngưỡng 0.5. Đổi ngưỡng F1 (0.844) → Precision 28.9%, nhưng Recall giảm còn 37.0% — vẫn cần đánh đổi theo mục tiêu thực tế.</a:t>
             </a:r>
             <a:endParaRPr lang="en-US" sz="1250" dirty="0"/>
           </a:p>
@@ -7897,7 +7897,7 @@
                 <a:ea typeface="Calibri" pitchFamily="34" charset="-122"/>
                 <a:cs typeface="Calibri" pitchFamily="34" charset="-120"/>
               </a:rPr>
-              <a:t>Mamdani Fuzzy Inference System mã hoá tri thức chuyên gia (8 luật IF-THEN) thành đặc trưng bổ sung; MLP học phần còn lại từ dữ liệu thô. Trên 500.000 lượt đăng nhập thật, mô hình đạt AUROC 0.877 và Recall 84.5% — phát hiện được phần lớn tấn công, với đánh đổi báo động giả có thể điều chỉnh qua ngưỡng quyết định.</a:t>
+              <a:t>Mamdani Fuzzy Inference System mã hoá tri thức chuyên gia (8 luật IF-THEN) thành đặc trưng bổ sung; MLP học phần còn lại từ dữ liệu thô. Trên 500.000 lượt đăng nhập thật, mô hình đạt AUROC 0.878 và Recall 84.3% — phát hiện được phần lớn tấn công, với đánh đổi báo động giả có thể điều chỉnh qua ngưỡng quyết định.</a:t>
             </a:r>
             <a:endParaRPr lang="en-US" sz="1600" dirty="0"/>
           </a:p>

--- a/SlideThuyetTrinh_RBA_MLP_Fuzzy.pptx
+++ b/SlideThuyetTrinh_RBA_MLP_Fuzzy.pptx
@@ -2657,7 +2657,7 @@
         </p:nvSpPr>
         <p:spPr>
           <a:xfrm>
-            <a:off x="822960" y="5349240"/>
+            <a:off x="822960" y="5212080"/>
             <a:ext cx="2926080" cy="0"/>
           </a:xfrm>
           <a:prstGeom prst="line">
@@ -2680,8 +2680,8 @@
         </p:nvSpPr>
         <p:spPr>
           <a:xfrm>
-            <a:off x="822960" y="5532120"/>
-            <a:ext cx="10058400" cy="457200"/>
+            <a:off x="822960" y="5349240"/>
+            <a:ext cx="10058400" cy="365760"/>
           </a:xfrm>
           <a:prstGeom prst="rect">
             <a:avLst/>
@@ -2705,7 +2705,46 @@
                 <a:ea typeface="Calibri" pitchFamily="34" charset="-122"/>
                 <a:cs typeface="Calibri" pitchFamily="34" charset="-120"/>
               </a:rPr>
-              <a:t>Họ và tên: ..............................       MSSV: ..............................       Lớp: ..............................</a:t>
+              <a:t>Phạm Trung Kiên — 2591310      Nguyễn Minh Tuấn — 2591325      Lê Phú Nhân — 2591317</a:t>
+            </a:r>
+            <a:endParaRPr lang="en-US" sz="1300" dirty="0"/>
+          </a:p>
+        </p:txBody>
+      </p:sp>
+      <p:sp>
+        <p:nvSpPr>
+          <p:cNvPr id="10" name="Text 8"/>
+          <p:cNvSpPr/>
+          <p:nvPr/>
+        </p:nvSpPr>
+        <p:spPr>
+          <a:xfrm>
+            <a:off x="822960" y="5715000"/>
+            <a:ext cx="10058400" cy="365760"/>
+          </a:xfrm>
+          <a:prstGeom prst="rect">
+            <a:avLst/>
+          </a:prstGeom>
+          <a:noFill/>
+          <a:ln/>
+        </p:spPr>
+        <p:txBody>
+          <a:bodyPr wrap="square" rtlCol="0" anchor="ctr"/>
+          <a:lstStyle/>
+          <a:p>
+            <a:pPr indent="0" marL="0">
+              <a:buNone/>
+            </a:pPr>
+            <a:r>
+              <a:rPr lang="en-US" sz="1300" dirty="0">
+                <a:solidFill>
+                  <a:srgbClr val="C3C2B7"/>
+                </a:solidFill>
+                <a:latin typeface="Calibri" pitchFamily="34" charset="0"/>
+                <a:ea typeface="Calibri" pitchFamily="34" charset="-122"/>
+                <a:cs typeface="Calibri" pitchFamily="34" charset="-120"/>
+              </a:rPr>
+              <a:t>Lớp: KHMT 2025B</a:t>
             </a:r>
             <a:endParaRPr lang="en-US" sz="1300" dirty="0"/>
           </a:p>

--- a/SlideThuyetTrinh_RBA_MLP_Fuzzy.pptx
+++ b/SlideThuyetTrinh_RBA_MLP_Fuzzy.pptx
@@ -518,10 +518,8 @@
           <a:lstStyle/>
           <a:p>
             <a:r>
-              <a:rPr lang="en-US" dirty="0"/>
-              <a:t/>
-            </a:r>
-            <a:endParaRPr lang="en-US" dirty="0"/>
+              <a:t>Slide mở đầu — giới thiệu đề tài: phát hiện đăng nhập rủi ro (RBA) bằng mô hình lai MLP kết hợp hệ mờ Mamdani. Giới thiệu nhóm và lớp. Lưu ý: nhấn mạnh đây là bài toán bảo mật thực tế, kết hợp học máy (MLP) với tri thức chuyên gia (luật mờ).</a:t>
+            </a:r>
           </a:p>
         </p:txBody>
       </p:sp>
@@ -606,10 +604,8 @@
           <a:lstStyle/>
           <a:p>
             <a:r>
-              <a:rPr lang="en-US" dirty="0"/>
-              <a:t/>
-            </a:r>
-            <a:endParaRPr lang="en-US" dirty="0"/>
+              <a:t>Giải thích bảng 8 luật IF-THEN mã hóa tri thức chuyên gia: R1–R4 đẩy về High (quốc gia/ASN mới, tỉ lệ thành công thấp, nhiều thay đổi, ASN hiếm); R5–R6 kéo về Low; R7–R8 giữ Medium. Lưu ý: thiết kế bất đối xứng có chủ đích — nhiều luật High hơn vì bảo mật ưu tiên phát hiện rủi ro.</a:t>
+            </a:r>
           </a:p>
         </p:txBody>
       </p:sp>
@@ -694,10 +690,8 @@
           <a:lstStyle/>
           <a:p>
             <a:r>
-              <a:rPr lang="en-US" dirty="0"/>
-              <a:t/>
-            </a:r>
-            <a:endParaRPr lang="en-US" dirty="0"/>
+              <a:t>Chạy một ví dụ cụ thể (mẫu rủi ro cao) qua 4 bước → điểm centroid = 0.839 (rủi ro cao). Luật R4 (asn_rarity ≈ 0.943) và R2 (tỉ lệ thành công thấp) kích hoạt mạnh nhất, kéo điểm lên cao. Lưu ý: dùng ví dụ số cụ thể để cho thấy hệ mờ ra quyết định như thế nào.</a:t>
+            </a:r>
           </a:p>
         </p:txBody>
       </p:sp>
@@ -782,10 +776,8 @@
           <a:lstStyle/>
           <a:p>
             <a:r>
-              <a:rPr lang="en-US" dirty="0"/>
-              <a:t/>
-            </a:r>
-            <a:endParaRPr lang="en-US" dirty="0"/>
+              <a:t>Trình bày kiến trúc MLP: đầu vào khoảng 39 chiều (19 đặc trưng số + one-hot Device Type + 16 đặc trưng mờ) → 3 tầng ẩn 128–64–32 (Linear + ReLU + BatchNorm + Dropout 0.3) → 1 logit → sigmoid ra xác suất. Lưu ý: nhấn 16 đặc trưng mờ từ Mamdani được đưa THẲNG vào MLP làm đầu vào.</a:t>
+            </a:r>
           </a:p>
         </p:txBody>
       </p:sp>
@@ -870,10 +862,8 @@
           <a:lstStyle/>
           <a:p>
             <a:r>
-              <a:rPr lang="en-US" dirty="0"/>
-              <a:t/>
-            </a:r>
-            <a:endParaRPr lang="en-US" dirty="0"/>
+              <a:t>Năm kỹ thuật huấn luyện: (1) xử lý mất cân bằng bằng BCEWithLogitsLoss với pos_weight = số âm/số dương; (2) tối ưu Adam, lr = 1e-3; (3) ReduceLROnPlateau giảm LR khi Val AUPRC chững; (4) dừng sớm theo Val AUPRC; (5) chia 70/15/15 phân tầng theo nhãn. Lưu ý: chọn mô hình tốt nhất theo AUPRC (không phải Accuracy) vì dữ liệu mất cân bằng.</a:t>
+            </a:r>
           </a:p>
         </p:txBody>
       </p:sp>
@@ -958,10 +948,8 @@
           <a:lstStyle/>
           <a:p>
             <a:r>
-              <a:rPr lang="en-US" dirty="0"/>
-              <a:t/>
-            </a:r>
-            <a:endParaRPr lang="en-US" dirty="0"/>
+              <a:t>Kết quả trên tập test 75.000 dòng: AUROC 87.8%, AUPRC 21.8%, Accuracy 79.3%, Precision 11.3%, Recall 84.3%, F1 20.0%. Recall cao = bắt được phần lớn tấn công; Precision thấp = nhiều báo động giả do mất cân bằng ở ngưỡng 0.5. Lưu ý: nhấn AUPRC (so với baseline ngẫu nhiên ~3%) mới phản ánh chất lượng thật; Accuracy dễ gây hiểu nhầm với dữ liệu lệch lớp.</a:t>
+            </a:r>
           </a:p>
         </p:txBody>
       </p:sp>
@@ -1046,10 +1034,8 @@
           <a:lstStyle/>
           <a:p>
             <a:r>
-              <a:rPr lang="en-US" dirty="0"/>
-              <a:t/>
-            </a:r>
-            <a:endParaRPr lang="en-US" dirty="0"/>
+              <a:t>Phân tích biểu đồ: train loss giảm ổn định, Val AUPRC/AUROC hội tụ trước epoch 30 (early stopping kích hoạt) → mô hình không overfitting. Đường Precision-Recall thấp hơn ROC nhiều — đúng đặc trưng bài toán chỉ ~3% dương. Lưu ý: dùng đường cong để chứng minh mô hình học ổn định và AUPRC mới là thước đo khó.</a:t>
+            </a:r>
           </a:p>
         </p:txBody>
       </p:sp>
@@ -1134,10 +1120,8 @@
           <a:lstStyle/>
           <a:p>
             <a:r>
-              <a:rPr lang="en-US" dirty="0"/>
-              <a:t/>
-            </a:r>
-            <a:endParaRPr lang="en-US" dirty="0"/>
+              <a:t>Đã phát hiện và khắc phục 2 lỗi: (1) hàm xmin/xmax trong hệ mờ từng tính lại theo từng batch (méo kết quả khi suy luận 1 dòng) — đã lưu cố định từ fit(); (2) rò rỉ thống kê toàn cục (median RTT, độ hiếm Country/ASN) trước đây tính trên cả val/test — đã sửa để chỉ fit trên train và huấn luyện lại. Hạn chế còn lại: Precision thấp; 8 luật mờ thiết kế thủ công. Hướng phát triển: Focal Loss, chọn ngưỡng theo chi phí, hoặc ANFIS. Lưu ý: nêu 2 lỗi tự phát hiện để thể hiện hiểu sâu và trung thực.</a:t>
+            </a:r>
           </a:p>
         </p:txBody>
       </p:sp>
@@ -1222,10 +1206,8 @@
           <a:lstStyle/>
           <a:p>
             <a:r>
-              <a:rPr lang="en-US" dirty="0"/>
-              <a:t/>
-            </a:r>
-            <a:endParaRPr lang="en-US" dirty="0"/>
+              <a:t>Kết luận: hệ lai MLP + Mamdani — tri thức chuyên gia (8 luật IF-THEN) và học sâu bổ trợ lẫn nhau. Trên 500.000 lượt đăng nhập thật, mô hình đạt AUROC 0.878 và Recall 84.3%, phát hiện được phần lớn tấn công; đánh đổi báo động giả có thể điều chỉnh qua ngưỡng quyết định. Lưu ý: nhấn đóng góp và tính GIẢI THÍCH ĐƯỢC của mô hình.</a:t>
+            </a:r>
           </a:p>
         </p:txBody>
       </p:sp>
@@ -1310,10 +1292,8 @@
           <a:lstStyle/>
           <a:p>
             <a:r>
-              <a:rPr lang="en-US" dirty="0"/>
-              <a:t/>
-            </a:r>
-            <a:endParaRPr lang="en-US" dirty="0"/>
+              <a:t>Slide cảm ơn và mời câu hỏi. Lưu ý: chuẩn bị sẵn câu trả lời cho các câu hỏi thường gặp — vì sao Precision thấp, cách chống data leakage, vì sao chọn Mamdani thay vì mô hình khác, ý nghĩa AUPRC.</a:t>
+            </a:r>
           </a:p>
         </p:txBody>
       </p:sp>
@@ -1398,10 +1378,8 @@
           <a:lstStyle/>
           <a:p>
             <a:r>
-              <a:rPr lang="en-US" dirty="0"/>
-              <a:t/>
-            </a:r>
-            <a:endParaRPr lang="en-US" dirty="0"/>
+              <a:t>Nêu mạch trình bày gồm 6 phần: (1) bài toán RBA, (2) kiến trúc hệ thống, (3) hệ mờ Mamdani, (4) mạng MLP, (5) kết quả thực nghiệm, (6) hạn chế &amp; kết luận. Lưu ý: đi nhanh slide này, chỉ giới thiệu bố cục.</a:t>
+            </a:r>
           </a:p>
         </p:txBody>
       </p:sp>
@@ -1486,10 +1464,8 @@
           <a:lstStyle/>
           <a:p>
             <a:r>
-              <a:rPr lang="en-US" dirty="0"/>
-              <a:t/>
-            </a:r>
-            <a:endParaRPr lang="en-US" dirty="0"/>
+              <a:t>Giải thích RBA: thay vì chỉ kiểm tra đúng/sai mật khẩu, hệ thống chấm điểm rủi ro cho mỗi lượt đăng nhập dựa trên ngữ cảnh (vị trí, thiết bị, nhà mạng, thời điểm, lịch sử hành vi). Rủi ro thấp → cho qua; rủi ro cao → yêu cầu xác thực thêm (OTP/2FA). Mục tiêu đồ án: dự đoán xác suất một lượt đăng nhập đến từ IP tấn công, trên 500.000 dòng log thật. Lưu ý: nhấn mạnh RBA cân bằng giữa an toàn và trải nghiệm người dùng.</a:t>
+            </a:r>
           </a:p>
         </p:txBody>
       </p:sp>
@@ -1574,10 +1550,8 @@
           <a:lstStyle/>
           <a:p>
             <a:r>
-              <a:rPr lang="en-US" dirty="0"/>
-              <a:t/>
-            </a:r>
-            <a:endParaRPr lang="en-US" dirty="0"/>
+              <a:t>Bộ dữ liệu khoảng 500.000 lượt đăng nhập, chỉ ~3% là tấn công (mất cân bằng nặng), 16 cột thô. Nguồn: Login Data Set for RBA (Wiefling và cộng sự) — log thật đã ẩn danh. Các cột gồm thời gian, User ID, RTT, vị trí (Country/City/ASN), thiết bị/trình duyệt/OS và các nhãn. Lưu ý: nhấn tỉ lệ ~3% dương là mấu chốt khiến bài toán khó và cần xử lý mất cân bằng.</a:t>
+            </a:r>
           </a:p>
         </p:txBody>
       </p:sp>
@@ -1662,10 +1636,8 @@
           <a:lstStyle/>
           <a:p>
             <a:r>
-              <a:rPr lang="en-US" dirty="0"/>
-              <a:t/>
-            </a:r>
-            <a:endParaRPr lang="en-US" dirty="0"/>
+              <a:t>Giải thích lý do chọn nhãn Is Attack IP: Is Account Takeover chỉ có ~4 mẫu dương trên 500.000 dòng (quá ít để học); Login Successful chỉ phản ánh lỗi kỹ thuật, không phải rủi ro bảo mật; Is Attack IP có ~3% dương — đủ dữ liệu và đúng bản chất bài toán chấm rủi ro. Lưu ý: đây là một quyết định quan trọng về dữ liệu, nên giải thích rõ.</a:t>
+            </a:r>
           </a:p>
         </p:txBody>
       </p:sp>
@@ -1750,10 +1722,8 @@
           <a:lstStyle/>
           <a:p>
             <a:r>
-              <a:rPr lang="en-US" dirty="0"/>
-              <a:t/>
-            </a:r>
-            <a:endParaRPr lang="en-US" dirty="0"/>
+              <a:t>Slide chuyển phần — giới thiệu kiến trúc mô hình lai MLP + Mamdani Fuzzy (xem sơ đồ tổng thể). Lưu ý: nhấn ý tưởng cốt lõi — hệ mờ tạo ra đặc trưng rủi ro, MLP dùng làm bộ phân loại; hai phần kết hợp ở TẦNG ĐẶC TRƯNG, không phải chạy song song để so sánh.</a:t>
+            </a:r>
           </a:p>
         </p:txBody>
       </p:sp>
@@ -1838,10 +1808,8 @@
           <a:lstStyle/>
           <a:p>
             <a:r>
-              <a:rPr lang="en-US" dirty="0"/>
-              <a:t/>
-            </a:r>
-            <a:endParaRPr lang="en-US" dirty="0"/>
+              <a:t>Trình bày 5 nhóm đặc trưng: thời gian, mạng (RTT), độ hiếm toàn cục Country/ASN, lịch sử người dùng, và thiết bị (mã hóa one-hot). Điểm kỹ thuật quan trọng: đặc trưng lịch sử chỉ dùng thông tin TRƯỚC ĐÓ của người dùng (dịch theo thời gian) để tránh rò rỉ dữ liệu (data leakage). Lưu ý: giám khảo hay hỏi về leakage — nên nhấn chỗ này.</a:t>
+            </a:r>
           </a:p>
         </p:txBody>
       </p:sp>
@@ -1926,10 +1894,8 @@
           <a:lstStyle/>
           <a:p>
             <a:r>
-              <a:rPr lang="en-US" dirty="0"/>
-              <a:t/>
-            </a:r>
-            <a:endParaRPr lang="en-US" dirty="0"/>
+              <a:t>Giải thích 4 bước suy diễn mờ Mamdani: (1) Mờ hóa — đưa 5 biến về mức Low/Medium/High bằng hàm tam giác, ngưỡng lấy từ phân vị trên tập train; (2) Đánh giá luật — 8 luật IF-THEN, AND = min, OR = max; (3) Gộp mờ — gộp 3 tập mờ đầu ra bằng phép max; (4) Giải mờ — dùng centroid để ra 1 điểm rủi ro duy nhất trong [0,1]. Lưu ý: đây là thuật toán cốt lõi, nên giải thích chậm và kỹ.</a:t>
+            </a:r>
           </a:p>
         </p:txBody>
       </p:sp>
@@ -2014,10 +1980,8 @@
           <a:lstStyle/>
           <a:p>
             <a:r>
-              <a:rPr lang="en-US" dirty="0"/>
-              <a:t/>
-            </a:r>
-            <a:endParaRPr lang="en-US" dirty="0"/>
+              <a:t>Cho xem các hàm thành viên thực tế (fit trên 500.000 dòng train): mỗi biến chia Low/Medium/High bằng hàm tam giác, ngưỡng lấy từ phân vị 20/50/80. Lưu ý: nhấn rằng ngưỡng được HỌC TỪ dữ liệu train chứ không đặt tùy tiện, và min/max cũng lấy từ train để tránh lệch khi suy luận.</a:t>
+            </a:r>
           </a:p>
         </p:txBody>
       </p:sp>
@@ -2466,6 +2430,10 @@
           </a:solidFill>
           <a:ln/>
         </p:spPr>
+        <p:txBody>
+          <a:bodyPr/>
+          <a:p/>
+        </p:txBody>
       </p:sp>
       <p:sp>
         <p:nvSpPr>
@@ -2486,6 +2454,10 @@
           </a:solidFill>
           <a:ln/>
         </p:spPr>
+        <p:txBody>
+          <a:bodyPr/>
+          <a:p/>
+        </p:txBody>
       </p:sp>
       <p:sp>
         <p:nvSpPr>
@@ -2508,6 +2480,10 @@
           </a:solidFill>
           <a:ln/>
         </p:spPr>
+        <p:txBody>
+          <a:bodyPr/>
+          <a:p/>
+        </p:txBody>
       </p:sp>
       <p:sp>
         <p:nvSpPr>
@@ -2534,7 +2510,7 @@
               <a:buNone/>
             </a:pPr>
             <a:r>
-              <a:rPr lang="en-US" sz="1400" b="1" spc="200" kern="0" dirty="0">
+              <a:rPr lang="en-US" sz="1600" b="1" spc="200" kern="0" dirty="0">
                 <a:solidFill>
                   <a:srgbClr val="CADCFC"/>
                 </a:solidFill>
@@ -2671,6 +2647,10 @@
             <a:prstDash val="solid"/>
           </a:ln>
         </p:spPr>
+        <p:txBody>
+          <a:bodyPr/>
+          <a:p/>
+        </p:txBody>
       </p:sp>
       <p:sp>
         <p:nvSpPr>
@@ -2697,7 +2677,7 @@
               <a:buNone/>
             </a:pPr>
             <a:r>
-              <a:rPr lang="en-US" sz="1300" dirty="0">
+              <a:rPr lang="en-US" sz="1600" dirty="0">
                 <a:solidFill>
                   <a:srgbClr val="C3C2B7"/>
                 </a:solidFill>
@@ -2736,7 +2716,7 @@
               <a:buNone/>
             </a:pPr>
             <a:r>
-              <a:rPr lang="en-US" sz="1300" dirty="0">
+              <a:rPr lang="en-US" sz="1600" dirty="0">
                 <a:solidFill>
                   <a:srgbClr val="C3C2B7"/>
                 </a:solidFill>
@@ -2800,7 +2780,7 @@
               <a:buNone/>
             </a:pPr>
             <a:r>
-              <a:rPr lang="en-US" sz="1300" b="1" spc="200" kern="0" dirty="0">
+              <a:rPr lang="en-US" sz="1600" b="1" spc="200" kern="0" dirty="0">
                 <a:solidFill>
                   <a:srgbClr val="1C7293"/>
                 </a:solidFill>
@@ -4763,7 +4743,7 @@
               <a:buNone/>
             </a:pPr>
             <a:r>
-              <a:rPr lang="en-US" sz="1000" dirty="0">
+              <a:rPr lang="en-US" sz="1600" dirty="0">
                 <a:solidFill>
                   <a:srgbClr val="A0A0A0"/>
                 </a:solidFill>
@@ -4827,7 +4807,7 @@
               <a:buNone/>
             </a:pPr>
             <a:r>
-              <a:rPr lang="en-US" sz="1300" b="1" spc="200" kern="0" dirty="0">
+              <a:rPr lang="en-US" sz="1600" b="1" spc="200" kern="0" dirty="0">
                 <a:solidFill>
                   <a:srgbClr val="1C7293"/>
                 </a:solidFill>
@@ -4925,6 +4905,10 @@
           </a:solidFill>
           <a:ln/>
         </p:spPr>
+        <p:txBody>
+          <a:bodyPr/>
+          <a:p/>
+        </p:txBody>
       </p:sp>
       <p:sp>
         <p:nvSpPr>
@@ -4993,7 +4977,7 @@
               <a:buNone/>
             </a:pPr>
             <a:r>
-              <a:rPr lang="en-US" sz="1150" dirty="0">
+              <a:rPr lang="en-US" sz="1600" dirty="0">
                 <a:solidFill>
                   <a:srgbClr val="FFFFFF"/>
                 </a:solidFill>
@@ -5001,7 +4985,7 @@
                 <a:ea typeface="Calibri" pitchFamily="34" charset="-122"/>
                 <a:cs typeface="Calibri" pitchFamily="34" charset="-120"/>
               </a:rPr>
-              <a:t>Centroid risk</a:t>
+              <a:t>Điểm rủi ro Centroid</a:t>
             </a:r>
             <a:endParaRPr lang="en-US" sz="1150" dirty="0"/>
           </a:p>
@@ -5013,7 +4997,7 @@
               <a:buNone/>
             </a:pPr>
             <a:r>
-              <a:rPr lang="en-US" sz="1150" dirty="0">
+              <a:rPr lang="en-US" sz="1600" dirty="0">
                 <a:solidFill>
                   <a:srgbClr val="FFFFFF"/>
                 </a:solidFill>
@@ -5052,7 +5036,7 @@
               <a:buNone/>
             </a:pPr>
             <a:r>
-              <a:rPr lang="en-US" sz="1000" dirty="0">
+              <a:rPr lang="en-US" sz="1600" dirty="0">
                 <a:solidFill>
                   <a:srgbClr val="A0A0A0"/>
                 </a:solidFill>
@@ -5116,7 +5100,7 @@
               <a:buNone/>
             </a:pPr>
             <a:r>
-              <a:rPr lang="en-US" sz="1300" b="1" spc="200" kern="0" dirty="0">
+              <a:rPr lang="en-US" sz="1600" b="1" spc="200" kern="0" dirty="0">
                 <a:solidFill>
                   <a:srgbClr val="1C7293"/>
                 </a:solidFill>
@@ -5163,7 +5147,7 @@
                 <a:ea typeface="Cambria" pitchFamily="34" charset="-122"/>
                 <a:cs typeface="Cambria" pitchFamily="34" charset="-120"/>
               </a:rPr>
-              <a:t>Kiến trúc mạng MLP Classifier</a:t>
+              <a:t>Kiến trúc mạng MLP (bộ phân loại)</a:t>
             </a:r>
             <a:endParaRPr lang="en-US" sz="3200" dirty="0"/>
           </a:p>
@@ -5218,7 +5202,7 @@
               <a:buNone/>
             </a:pPr>
             <a:r>
-              <a:rPr lang="en-US" sz="1000" dirty="0">
+              <a:rPr lang="en-US" sz="1600" dirty="0">
                 <a:solidFill>
                   <a:srgbClr val="A0A0A0"/>
                 </a:solidFill>
@@ -5282,7 +5266,7 @@
               <a:buNone/>
             </a:pPr>
             <a:r>
-              <a:rPr lang="en-US" sz="1300" b="1" spc="200" kern="0" dirty="0">
+              <a:rPr lang="en-US" sz="1600" b="1" spc="200" kern="0" dirty="0">
                 <a:solidFill>
                   <a:srgbClr val="1C7293"/>
                 </a:solidFill>
@@ -5361,6 +5345,10 @@
             <a:prstDash val="solid"/>
           </a:ln>
         </p:spPr>
+        <p:txBody>
+          <a:bodyPr/>
+          <a:p/>
+        </p:txBody>
       </p:sp>
       <p:sp>
         <p:nvSpPr>
@@ -5381,6 +5369,10 @@
           </a:solidFill>
           <a:ln/>
         </p:spPr>
+        <p:txBody>
+          <a:bodyPr/>
+          <a:p/>
+        </p:txBody>
       </p:sp>
       <p:sp>
         <p:nvSpPr>
@@ -5443,7 +5435,7 @@
               <a:buNone/>
             </a:pPr>
             <a:r>
-              <a:rPr lang="en-US" sz="1400" b="1" dirty="0">
+              <a:rPr lang="en-US" sz="1600" b="1" dirty="0">
                 <a:solidFill>
                   <a:srgbClr val="132747"/>
                 </a:solidFill>
@@ -5482,7 +5474,7 @@
               <a:buNone/>
             </a:pPr>
             <a:r>
-              <a:rPr lang="en-US" sz="1250" dirty="0">
+              <a:rPr lang="en-US" sz="1600" dirty="0">
                 <a:solidFill>
                   <a:srgbClr val="232323"/>
                 </a:solidFill>
@@ -5522,6 +5514,10 @@
             <a:prstDash val="solid"/>
           </a:ln>
         </p:spPr>
+        <p:txBody>
+          <a:bodyPr/>
+          <a:p/>
+        </p:txBody>
       </p:sp>
       <p:sp>
         <p:nvSpPr>
@@ -5542,6 +5538,10 @@
           </a:solidFill>
           <a:ln/>
         </p:spPr>
+        <p:txBody>
+          <a:bodyPr/>
+          <a:p/>
+        </p:txBody>
       </p:sp>
       <p:sp>
         <p:nvSpPr>
@@ -5604,7 +5604,7 @@
               <a:buNone/>
             </a:pPr>
             <a:r>
-              <a:rPr lang="en-US" sz="1400" b="1" dirty="0">
+              <a:rPr lang="en-US" sz="1600" b="1" dirty="0">
                 <a:solidFill>
                   <a:srgbClr val="132747"/>
                 </a:solidFill>
@@ -5612,7 +5612,7 @@
                 <a:ea typeface="Cambria" pitchFamily="34" charset="-122"/>
                 <a:cs typeface="Cambria" pitchFamily="34" charset="-120"/>
               </a:rPr>
-              <a:t>Optimizer</a:t>
+              <a:t>Bộ tối ưu (Optimizer)</a:t>
             </a:r>
             <a:endParaRPr lang="en-US" sz="1400" dirty="0"/>
           </a:p>
@@ -5643,7 +5643,7 @@
               <a:buNone/>
             </a:pPr>
             <a:r>
-              <a:rPr lang="en-US" sz="1250" dirty="0">
+              <a:rPr lang="en-US" sz="1600" dirty="0">
                 <a:solidFill>
                   <a:srgbClr val="232323"/>
                 </a:solidFill>
@@ -5683,6 +5683,10 @@
             <a:prstDash val="solid"/>
           </a:ln>
         </p:spPr>
+        <p:txBody>
+          <a:bodyPr/>
+          <a:p/>
+        </p:txBody>
       </p:sp>
       <p:sp>
         <p:nvSpPr>
@@ -5703,6 +5707,10 @@
           </a:solidFill>
           <a:ln/>
         </p:spPr>
+        <p:txBody>
+          <a:bodyPr/>
+          <a:p/>
+        </p:txBody>
       </p:sp>
       <p:sp>
         <p:nvSpPr>
@@ -5765,7 +5773,7 @@
               <a:buNone/>
             </a:pPr>
             <a:r>
-              <a:rPr lang="en-US" sz="1400" b="1" dirty="0">
+              <a:rPr lang="en-US" sz="1600" b="1" dirty="0">
                 <a:solidFill>
                   <a:srgbClr val="132747"/>
                 </a:solidFill>
@@ -5773,7 +5781,7 @@
                 <a:ea typeface="Cambria" pitchFamily="34" charset="-122"/>
                 <a:cs typeface="Cambria" pitchFamily="34" charset="-120"/>
               </a:rPr>
-              <a:t>Scheduler</a:t>
+              <a:t>Bộ điều chỉnh LR (Scheduler)</a:t>
             </a:r>
             <a:endParaRPr lang="en-US" sz="1400" dirty="0"/>
           </a:p>
@@ -5804,7 +5812,7 @@
               <a:buNone/>
             </a:pPr>
             <a:r>
-              <a:rPr lang="en-US" sz="1250" dirty="0">
+              <a:rPr lang="en-US" sz="1600" dirty="0">
                 <a:solidFill>
                   <a:srgbClr val="232323"/>
                 </a:solidFill>
@@ -5844,6 +5852,10 @@
             <a:prstDash val="solid"/>
           </a:ln>
         </p:spPr>
+        <p:txBody>
+          <a:bodyPr/>
+          <a:p/>
+        </p:txBody>
       </p:sp>
       <p:sp>
         <p:nvSpPr>
@@ -5864,6 +5876,10 @@
           </a:solidFill>
           <a:ln/>
         </p:spPr>
+        <p:txBody>
+          <a:bodyPr/>
+          <a:p/>
+        </p:txBody>
       </p:sp>
       <p:sp>
         <p:nvSpPr>
@@ -5926,7 +5942,7 @@
               <a:buNone/>
             </a:pPr>
             <a:r>
-              <a:rPr lang="en-US" sz="1400" b="1" dirty="0">
+              <a:rPr lang="en-US" sz="1600" b="1" dirty="0">
                 <a:solidFill>
                   <a:srgbClr val="132747"/>
                 </a:solidFill>
@@ -5934,7 +5950,7 @@
                 <a:ea typeface="Cambria" pitchFamily="34" charset="-122"/>
                 <a:cs typeface="Cambria" pitchFamily="34" charset="-120"/>
               </a:rPr>
-              <a:t>Early stopping</a:t>
+              <a:t>Dừng sớm (Early stopping)</a:t>
             </a:r>
             <a:endParaRPr lang="en-US" sz="1400" dirty="0"/>
           </a:p>
@@ -5965,7 +5981,7 @@
               <a:buNone/>
             </a:pPr>
             <a:r>
-              <a:rPr lang="en-US" sz="1250" dirty="0">
+              <a:rPr lang="en-US" sz="1600" dirty="0">
                 <a:solidFill>
                   <a:srgbClr val="232323"/>
                 </a:solidFill>
@@ -6005,6 +6021,10 @@
             <a:prstDash val="solid"/>
           </a:ln>
         </p:spPr>
+        <p:txBody>
+          <a:bodyPr/>
+          <a:p/>
+        </p:txBody>
       </p:sp>
       <p:sp>
         <p:nvSpPr>
@@ -6025,6 +6045,10 @@
           </a:solidFill>
           <a:ln/>
         </p:spPr>
+        <p:txBody>
+          <a:bodyPr/>
+          <a:p/>
+        </p:txBody>
       </p:sp>
       <p:sp>
         <p:nvSpPr>
@@ -6087,7 +6111,7 @@
               <a:buNone/>
             </a:pPr>
             <a:r>
-              <a:rPr lang="en-US" sz="1400" b="1" dirty="0">
+              <a:rPr lang="en-US" sz="1600" b="1" dirty="0">
                 <a:solidFill>
                   <a:srgbClr val="132747"/>
                 </a:solidFill>
@@ -6126,7 +6150,7 @@
               <a:buNone/>
             </a:pPr>
             <a:r>
-              <a:rPr lang="en-US" sz="1250" dirty="0">
+              <a:rPr lang="en-US" sz="1600" dirty="0">
                 <a:solidFill>
                   <a:srgbClr val="232323"/>
                 </a:solidFill>
@@ -6165,7 +6189,7 @@
               <a:buNone/>
             </a:pPr>
             <a:r>
-              <a:rPr lang="en-US" sz="1000" dirty="0">
+              <a:rPr lang="en-US" sz="1600" dirty="0">
                 <a:solidFill>
                   <a:srgbClr val="A0A0A0"/>
                 </a:solidFill>
@@ -6229,7 +6253,7 @@
               <a:buNone/>
             </a:pPr>
             <a:r>
-              <a:rPr lang="en-US" sz="1300" b="1" spc="200" kern="0" dirty="0">
+              <a:rPr lang="en-US" sz="1600" b="1" spc="200" kern="0" dirty="0">
                 <a:solidFill>
                   <a:srgbClr val="CADCFC"/>
                 </a:solidFill>
@@ -6308,6 +6332,10 @@
             <a:prstDash val="solid"/>
           </a:ln>
         </p:spPr>
+        <p:txBody>
+          <a:bodyPr/>
+          <a:p/>
+        </p:txBody>
       </p:sp>
       <p:sp>
         <p:nvSpPr>
@@ -6373,7 +6401,7 @@
               <a:buNone/>
             </a:pPr>
             <a:r>
-              <a:rPr lang="en-US" sz="1300" b="1" dirty="0">
+              <a:rPr lang="en-US" sz="1600" b="1" dirty="0">
                 <a:solidFill>
                   <a:srgbClr val="FFFFFF"/>
                 </a:solidFill>
@@ -6413,6 +6441,10 @@
             <a:prstDash val="solid"/>
           </a:ln>
         </p:spPr>
+        <p:txBody>
+          <a:bodyPr/>
+          <a:p/>
+        </p:txBody>
       </p:sp>
       <p:sp>
         <p:nvSpPr>
@@ -6478,7 +6510,7 @@
               <a:buNone/>
             </a:pPr>
             <a:r>
-              <a:rPr lang="en-US" sz="1300" b="1" dirty="0">
+              <a:rPr lang="en-US" sz="1600" b="1" dirty="0">
                 <a:solidFill>
                   <a:srgbClr val="FFFFFF"/>
                 </a:solidFill>
@@ -6518,6 +6550,10 @@
             <a:prstDash val="solid"/>
           </a:ln>
         </p:spPr>
+        <p:txBody>
+          <a:bodyPr/>
+          <a:p/>
+        </p:txBody>
       </p:sp>
       <p:sp>
         <p:nvSpPr>
@@ -6583,7 +6619,7 @@
               <a:buNone/>
             </a:pPr>
             <a:r>
-              <a:rPr lang="en-US" sz="1300" b="1" dirty="0">
+              <a:rPr lang="en-US" sz="1600" b="1" dirty="0">
                 <a:solidFill>
                   <a:srgbClr val="FFFFFF"/>
                 </a:solidFill>
@@ -6623,6 +6659,10 @@
             <a:prstDash val="solid"/>
           </a:ln>
         </p:spPr>
+        <p:txBody>
+          <a:bodyPr/>
+          <a:p/>
+        </p:txBody>
       </p:sp>
       <p:sp>
         <p:nvSpPr>
@@ -6688,7 +6728,7 @@
               <a:buNone/>
             </a:pPr>
             <a:r>
-              <a:rPr lang="en-US" sz="1300" b="1" dirty="0">
+              <a:rPr lang="en-US" sz="1600" b="1" dirty="0">
                 <a:solidFill>
                   <a:srgbClr val="FFFFFF"/>
                 </a:solidFill>
@@ -6728,6 +6768,10 @@
             <a:prstDash val="solid"/>
           </a:ln>
         </p:spPr>
+        <p:txBody>
+          <a:bodyPr/>
+          <a:p/>
+        </p:txBody>
       </p:sp>
       <p:sp>
         <p:nvSpPr>
@@ -6793,7 +6837,7 @@
               <a:buNone/>
             </a:pPr>
             <a:r>
-              <a:rPr lang="en-US" sz="1300" b="1" dirty="0">
+              <a:rPr lang="en-US" sz="1600" b="1" dirty="0">
                 <a:solidFill>
                   <a:srgbClr val="FFFFFF"/>
                 </a:solidFill>
@@ -6833,6 +6877,10 @@
             <a:prstDash val="solid"/>
           </a:ln>
         </p:spPr>
+        <p:txBody>
+          <a:bodyPr/>
+          <a:p/>
+        </p:txBody>
       </p:sp>
       <p:sp>
         <p:nvSpPr>
@@ -6898,7 +6946,7 @@
               <a:buNone/>
             </a:pPr>
             <a:r>
-              <a:rPr lang="en-US" sz="1300" b="1" dirty="0">
+              <a:rPr lang="en-US" sz="1600" b="1" dirty="0">
                 <a:solidFill>
                   <a:srgbClr val="FFFFFF"/>
                 </a:solidFill>
@@ -6940,7 +6988,7 @@
               <a:buNone/>
             </a:pPr>
             <a:r>
-              <a:rPr lang="en-US" sz="1400" i="1" dirty="0">
+              <a:rPr lang="en-US" sz="1600" i="1" dirty="0">
                 <a:solidFill>
                   <a:srgbClr val="D6DEEB"/>
                 </a:solidFill>
@@ -6979,7 +7027,7 @@
               <a:buNone/>
             </a:pPr>
             <a:r>
-              <a:rPr lang="en-US" sz="1000" dirty="0">
+              <a:rPr lang="en-US" sz="1600" dirty="0">
                 <a:solidFill>
                   <a:srgbClr val="8FA3C7"/>
                 </a:solidFill>
@@ -7043,7 +7091,7 @@
               <a:buNone/>
             </a:pPr>
             <a:r>
-              <a:rPr lang="en-US" sz="1300" b="1" spc="200" kern="0" dirty="0">
+              <a:rPr lang="en-US" sz="1600" b="1" spc="200" kern="0" dirty="0">
                 <a:solidFill>
                   <a:srgbClr val="1C7293"/>
                 </a:solidFill>
@@ -7177,6 +7225,10 @@
             </a:outerShdw>
           </a:effectLst>
         </p:spPr>
+        <p:txBody>
+          <a:bodyPr/>
+          <a:p/>
+        </p:txBody>
       </p:sp>
       <p:sp>
         <p:nvSpPr>
@@ -7203,7 +7255,7 @@
               <a:buNone/>
             </a:pPr>
             <a:r>
-              <a:rPr lang="en-US" sz="1300" b="1" spc="200" kern="0" dirty="0">
+              <a:rPr lang="en-US" sz="1600" b="1" spc="200" kern="0" dirty="0">
                 <a:solidFill>
                   <a:srgbClr val="1C7293"/>
                 </a:solidFill>
@@ -7245,7 +7297,7 @@
               <a:buNone/>
             </a:pPr>
             <a:r>
-              <a:rPr lang="en-US" sz="1400" dirty="0">
+              <a:rPr lang="en-US" sz="1600" dirty="0">
                 <a:solidFill>
                   <a:srgbClr val="232323"/>
                 </a:solidFill>
@@ -7284,7 +7336,7 @@
               <a:buNone/>
             </a:pPr>
             <a:r>
-              <a:rPr lang="en-US" sz="1000" dirty="0">
+              <a:rPr lang="en-US" sz="1600" dirty="0">
                 <a:solidFill>
                   <a:srgbClr val="A0A0A0"/>
                 </a:solidFill>
@@ -7348,7 +7400,7 @@
               <a:buNone/>
             </a:pPr>
             <a:r>
-              <a:rPr lang="en-US" sz="1300" b="1" spc="200" kern="0" dirty="0">
+              <a:rPr lang="en-US" sz="1600" b="1" spc="200" kern="0" dirty="0">
                 <a:solidFill>
                   <a:srgbClr val="1C7293"/>
                 </a:solidFill>
@@ -7427,6 +7479,10 @@
             <a:prstDash val="solid"/>
           </a:ln>
         </p:spPr>
+        <p:txBody>
+          <a:bodyPr/>
+          <a:p/>
+        </p:txBody>
       </p:sp>
       <p:sp>
         <p:nvSpPr>
@@ -7453,7 +7509,7 @@
               <a:buNone/>
             </a:pPr>
             <a:r>
-              <a:rPr lang="en-US" sz="1450" b="1" dirty="0">
+              <a:rPr lang="en-US" sz="1600" b="1" dirty="0">
                 <a:solidFill>
                   <a:srgbClr val="0CA30C"/>
                 </a:solidFill>
@@ -7499,7 +7555,7 @@
               <a:buChar char="•"/>
             </a:pPr>
             <a:r>
-              <a:rPr lang="en-US" sz="1200" dirty="0">
+              <a:rPr lang="en-US" sz="1600" dirty="0">
                 <a:solidFill>
                   <a:srgbClr val="232323"/>
                 </a:solidFill>
@@ -7507,7 +7563,7 @@
                 <a:ea typeface="Calibri" pitchFamily="34" charset="-122"/>
                 <a:cs typeface="Calibri" pitchFamily="34" charset="-120"/>
               </a:rPr>
-              <a:t>xmin/xmax trong fuzzy_mamdani.py từng tính lại theo batch — méo kết quả khi suy luận 1 dòng đơn lẻ. Đã sửa: lưu cố định từ fit().</a:t>
+              <a:t>Lỗi 1 — Thước đo dùng để chấm điểm trước đây bị tính lại theo từng nhóm dữ liệu nhỏ thay vì cố định từ lúc huấn luyện, làm điểm rủi ro của một lượt đăng nhập riêng lẻ bị lệch. Đã sửa: cố định thước đo học từ tập huấn luyện.</a:t>
             </a:r>
             <a:endParaRPr lang="en-US" sz="1200" dirty="0"/>
           </a:p>
@@ -7523,7 +7579,7 @@
               <a:buChar char="•"/>
             </a:pPr>
             <a:r>
-              <a:rPr lang="en-US" sz="1200" dirty="0">
+              <a:rPr lang="en-US" sz="1600" dirty="0">
                 <a:solidFill>
                   <a:srgbClr val="232323"/>
                 </a:solidFill>
@@ -7531,7 +7587,7 @@
                 <a:ea typeface="Calibri" pitchFamily="34" charset="-122"/>
                 <a:cs typeface="Calibri" pitchFamily="34" charset="-120"/>
               </a:rPr>
-              <a:t>Leakage thống kê toàn cục: median RTT và độ hiếm Country/ASN trước đây tính trên CẢ dữ liệu (gồm val/test). Đã sửa: fit_global_stats() chỉ trên train.</a:t>
+              <a:t>Lỗi 2 — Một vài con số thống kê chung trước đây được tính trên cả phần dữ liệu dùng để kiểm tra, làm kết quả đánh giá cao hơn thực tế. Đã sửa: chỉ tính trên phần dữ liệu huấn luyện.</a:t>
             </a:r>
             <a:endParaRPr lang="en-US" sz="1200" dirty="0"/>
           </a:p>
@@ -7544,7 +7600,7 @@
               <a:buChar char="•"/>
             </a:pPr>
             <a:r>
-              <a:rPr lang="en-US" sz="1200" dirty="0">
+              <a:rPr lang="en-US" sz="1600" dirty="0">
                 <a:solidFill>
                   <a:srgbClr val="232323"/>
                 </a:solidFill>
@@ -7552,7 +7608,7 @@
                 <a:ea typeface="Calibri" pitchFamily="34" charset="-122"/>
                 <a:cs typeface="Calibri" pitchFamily="34" charset="-120"/>
               </a:rPr>
-              <a:t>Đã huấn luyện lại sau cả 2 lần sửa — kiểm chứng bằng demo inference.py cho kết quả tách biệt hợp lý giữa 2 kịch bản.</a:t>
+              <a:t>Sau khi sửa cả 2 lỗi, mô hình đã được huấn luyện lại và chạy thử — cho kết quả hợp lý, phân biệt rõ trường hợp rủi ro cao và thấp.</a:t>
             </a:r>
             <a:endParaRPr lang="en-US" sz="1200" dirty="0"/>
           </a:p>
@@ -7584,6 +7640,10 @@
             <a:prstDash val="solid"/>
           </a:ln>
         </p:spPr>
+        <p:txBody>
+          <a:bodyPr/>
+          <a:p/>
+        </p:txBody>
       </p:sp>
       <p:sp>
         <p:nvSpPr>
@@ -7610,7 +7670,7 @@
               <a:buNone/>
             </a:pPr>
             <a:r>
-              <a:rPr lang="en-US" sz="1450" b="1" dirty="0">
+              <a:rPr lang="en-US" sz="1600" b="1" dirty="0">
                 <a:solidFill>
                   <a:srgbClr val="D03B3B"/>
                 </a:solidFill>
@@ -7656,7 +7716,7 @@
               <a:buChar char="•"/>
             </a:pPr>
             <a:r>
-              <a:rPr lang="en-US" sz="1250" dirty="0">
+              <a:rPr lang="en-US" sz="1600" dirty="0">
                 <a:solidFill>
                   <a:srgbClr val="232323"/>
                 </a:solidFill>
@@ -7664,7 +7724,7 @@
                 <a:ea typeface="Calibri" pitchFamily="34" charset="-122"/>
                 <a:cs typeface="Calibri" pitchFamily="34" charset="-120"/>
               </a:rPr>
-              <a:t>Precision thấp (11.3%) ở ngưỡng 0.5. Đổi ngưỡng F1 (0.844) → Precision 28.9%, nhưng Recall giảm còn 37.0% — vẫn cần đánh đổi theo mục tiêu thực tế.</a:t>
+              <a:t>Tỉ lệ cảnh báo đúng còn thấp: trung bình khoảng 9 cảnh báo tấn công mới có 1 cảnh báo đúng (nhiều báo động giả). Có thể chỉnh mức ngưỡng để tăng tỉ lệ đúng, nhưng đổi lại sẽ bỏ sót nhiều tấn công hơn.</a:t>
             </a:r>
             <a:endParaRPr lang="en-US" sz="1250" dirty="0"/>
           </a:p>
@@ -7680,7 +7740,7 @@
               <a:buChar char="•"/>
             </a:pPr>
             <a:r>
-              <a:rPr lang="en-US" sz="1250" dirty="0">
+              <a:rPr lang="en-US" sz="1600" dirty="0">
                 <a:solidFill>
                   <a:srgbClr val="232323"/>
                 </a:solidFill>
@@ -7688,7 +7748,7 @@
                 <a:ea typeface="Calibri" pitchFamily="34" charset="-122"/>
                 <a:cs typeface="Calibri" pitchFamily="34" charset="-120"/>
               </a:rPr>
-              <a:t>8 luật fuzzy thiết kế thủ công, chưa học tự động từ dữ liệu.</a:t>
+              <a:t>8 luật của hệ mờ hiện do con người tự đặt, chưa để máy tự học từ dữ liệu.</a:t>
             </a:r>
             <a:endParaRPr lang="en-US" sz="1250" dirty="0"/>
           </a:p>
@@ -7701,7 +7761,7 @@
               <a:buChar char="•"/>
             </a:pPr>
             <a:r>
-              <a:rPr lang="en-US" sz="1250" dirty="0">
+              <a:rPr lang="en-US" sz="1600" dirty="0">
                 <a:solidFill>
                   <a:srgbClr val="232323"/>
                 </a:solidFill>
@@ -7709,7 +7769,7 @@
                 <a:ea typeface="Calibri" pitchFamily="34" charset="-122"/>
                 <a:cs typeface="Calibri" pitchFamily="34" charset="-120"/>
               </a:rPr>
-              <a:t>Hướng tới: thử Focal Loss, chọn ngưỡng theo chi phí thực tế, hoặc dùng ANFIS để tự học tham số hàm thành viên.</a:t>
+              <a:t>Hướng phát triển: xử lý dữ liệu mất cân bằng tốt hơn, chọn mức ngưỡng theo chi phí thực tế, và cho máy tự học bộ luật mờ thay vì đặt thủ công.</a:t>
             </a:r>
             <a:endParaRPr lang="en-US" sz="1250" dirty="0"/>
           </a:p>
@@ -7740,7 +7800,7 @@
               <a:buNone/>
             </a:pPr>
             <a:r>
-              <a:rPr lang="en-US" sz="1000" dirty="0">
+              <a:rPr lang="en-US" sz="1600" dirty="0">
                 <a:solidFill>
                   <a:srgbClr val="A0A0A0"/>
                 </a:solidFill>
@@ -7798,6 +7858,10 @@
           </a:solidFill>
           <a:ln/>
         </p:spPr>
+        <p:txBody>
+          <a:bodyPr/>
+          <a:p/>
+        </p:txBody>
       </p:sp>
       <p:sp>
         <p:nvSpPr>
@@ -7824,7 +7888,7 @@
               <a:buNone/>
             </a:pPr>
             <a:r>
-              <a:rPr lang="en-US" sz="1300" b="1" spc="200" kern="0" dirty="0">
+              <a:rPr lang="en-US" sz="1600" b="1" spc="200" kern="0" dirty="0">
                 <a:solidFill>
                   <a:srgbClr val="CADCFC"/>
                 </a:solidFill>
@@ -7967,7 +8031,7 @@
               <a:buNone/>
             </a:pPr>
             <a:r>
-              <a:rPr lang="en-US" sz="1000" dirty="0">
+              <a:rPr lang="en-US" sz="1600" dirty="0">
                 <a:solidFill>
                   <a:srgbClr val="8FA3C7"/>
                 </a:solidFill>
@@ -8025,6 +8089,10 @@
           </a:solidFill>
           <a:ln/>
         </p:spPr>
+        <p:txBody>
+          <a:bodyPr/>
+          <a:p/>
+        </p:txBody>
       </p:sp>
       <p:sp>
         <p:nvSpPr>
@@ -8177,7 +8245,7 @@
               <a:buNone/>
             </a:pPr>
             <a:r>
-              <a:rPr lang="en-US" sz="1300" b="1" spc="200" kern="0" dirty="0">
+              <a:rPr lang="en-US" sz="1600" b="1" spc="200" kern="0" dirty="0">
                 <a:solidFill>
                   <a:srgbClr val="1C7293"/>
                 </a:solidFill>
@@ -8263,6 +8331,10 @@
             </a:outerShdw>
           </a:effectLst>
         </p:spPr>
+        <p:txBody>
+          <a:bodyPr/>
+          <a:p/>
+        </p:txBody>
       </p:sp>
       <p:sp>
         <p:nvSpPr>
@@ -8283,6 +8355,10 @@
           </a:solidFill>
           <a:ln/>
         </p:spPr>
+        <p:txBody>
+          <a:bodyPr/>
+          <a:p/>
+        </p:txBody>
       </p:sp>
       <p:sp>
         <p:nvSpPr>
@@ -8387,7 +8463,7 @@
               <a:buNone/>
             </a:pPr>
             <a:r>
-              <a:rPr lang="en-US" sz="1250" dirty="0">
+              <a:rPr lang="en-US" sz="1600" dirty="0">
                 <a:solidFill>
                   <a:srgbClr val="52514E"/>
                 </a:solidFill>
@@ -8434,6 +8510,10 @@
             </a:outerShdw>
           </a:effectLst>
         </p:spPr>
+        <p:txBody>
+          <a:bodyPr/>
+          <a:p/>
+        </p:txBody>
       </p:sp>
       <p:sp>
         <p:nvSpPr>
@@ -8454,6 +8534,10 @@
           </a:solidFill>
           <a:ln/>
         </p:spPr>
+        <p:txBody>
+          <a:bodyPr/>
+          <a:p/>
+        </p:txBody>
       </p:sp>
       <p:sp>
         <p:nvSpPr>
@@ -8558,7 +8642,7 @@
               <a:buNone/>
             </a:pPr>
             <a:r>
-              <a:rPr lang="en-US" sz="1250" dirty="0">
+              <a:rPr lang="en-US" sz="1600" dirty="0">
                 <a:solidFill>
                   <a:srgbClr val="52514E"/>
                 </a:solidFill>
@@ -8605,6 +8689,10 @@
             </a:outerShdw>
           </a:effectLst>
         </p:spPr>
+        <p:txBody>
+          <a:bodyPr/>
+          <a:p/>
+        </p:txBody>
       </p:sp>
       <p:sp>
         <p:nvSpPr>
@@ -8625,6 +8713,10 @@
           </a:solidFill>
           <a:ln/>
         </p:spPr>
+        <p:txBody>
+          <a:bodyPr/>
+          <a:p/>
+        </p:txBody>
       </p:sp>
       <p:sp>
         <p:nvSpPr>
@@ -8729,7 +8821,7 @@
               <a:buNone/>
             </a:pPr>
             <a:r>
-              <a:rPr lang="en-US" sz="1250" dirty="0">
+              <a:rPr lang="en-US" sz="1600" dirty="0">
                 <a:solidFill>
                   <a:srgbClr val="52514E"/>
                 </a:solidFill>
@@ -8776,6 +8868,10 @@
             </a:outerShdw>
           </a:effectLst>
         </p:spPr>
+        <p:txBody>
+          <a:bodyPr/>
+          <a:p/>
+        </p:txBody>
       </p:sp>
       <p:sp>
         <p:nvSpPr>
@@ -8796,6 +8892,10 @@
           </a:solidFill>
           <a:ln/>
         </p:spPr>
+        <p:txBody>
+          <a:bodyPr/>
+          <a:p/>
+        </p:txBody>
       </p:sp>
       <p:sp>
         <p:nvSpPr>
@@ -8900,7 +9000,7 @@
               <a:buNone/>
             </a:pPr>
             <a:r>
-              <a:rPr lang="en-US" sz="1250" dirty="0">
+              <a:rPr lang="en-US" sz="1600" dirty="0">
                 <a:solidFill>
                   <a:srgbClr val="52514E"/>
                 </a:solidFill>
@@ -8947,6 +9047,10 @@
             </a:outerShdw>
           </a:effectLst>
         </p:spPr>
+        <p:txBody>
+          <a:bodyPr/>
+          <a:p/>
+        </p:txBody>
       </p:sp>
       <p:sp>
         <p:nvSpPr>
@@ -8967,6 +9071,10 @@
           </a:solidFill>
           <a:ln/>
         </p:spPr>
+        <p:txBody>
+          <a:bodyPr/>
+          <a:p/>
+        </p:txBody>
       </p:sp>
       <p:sp>
         <p:nvSpPr>
@@ -9071,7 +9179,7 @@
               <a:buNone/>
             </a:pPr>
             <a:r>
-              <a:rPr lang="en-US" sz="1250" dirty="0">
+              <a:rPr lang="en-US" sz="1600" dirty="0">
                 <a:solidFill>
                   <a:srgbClr val="52514E"/>
                 </a:solidFill>
@@ -9118,6 +9226,10 @@
             </a:outerShdw>
           </a:effectLst>
         </p:spPr>
+        <p:txBody>
+          <a:bodyPr/>
+          <a:p/>
+        </p:txBody>
       </p:sp>
       <p:sp>
         <p:nvSpPr>
@@ -9138,6 +9250,10 @@
           </a:solidFill>
           <a:ln/>
         </p:spPr>
+        <p:txBody>
+          <a:bodyPr/>
+          <a:p/>
+        </p:txBody>
       </p:sp>
       <p:sp>
         <p:nvSpPr>
@@ -9242,7 +9358,7 @@
               <a:buNone/>
             </a:pPr>
             <a:r>
-              <a:rPr lang="en-US" sz="1250" dirty="0">
+              <a:rPr lang="en-US" sz="1600" dirty="0">
                 <a:solidFill>
                   <a:srgbClr val="52514E"/>
                 </a:solidFill>
@@ -9281,7 +9397,7 @@
               <a:buNone/>
             </a:pPr>
             <a:r>
-              <a:rPr lang="en-US" sz="1000" dirty="0">
+              <a:rPr lang="en-US" sz="1600" dirty="0">
                 <a:solidFill>
                   <a:srgbClr val="A0A0A0"/>
                 </a:solidFill>
@@ -9345,7 +9461,7 @@
               <a:buNone/>
             </a:pPr>
             <a:r>
-              <a:rPr lang="en-US" sz="1300" b="1" spc="200" kern="0" dirty="0">
+              <a:rPr lang="en-US" sz="1600" b="1" spc="200" kern="0" dirty="0">
                 <a:solidFill>
                   <a:srgbClr val="1C7293"/>
                 </a:solidFill>
@@ -9426,7 +9542,7 @@
               <a:buNone/>
             </a:pPr>
             <a:r>
-              <a:rPr lang="en-US" sz="1550" dirty="0">
+              <a:rPr lang="en-US" sz="1600" dirty="0">
                 <a:solidFill>
                   <a:srgbClr val="232323"/>
                 </a:solidFill>
@@ -9468,7 +9584,7 @@
               <a:buNone/>
             </a:pPr>
             <a:r>
-              <a:rPr lang="en-US" sz="1400" i="1" dirty="0">
+              <a:rPr lang="en-US" sz="1600" i="1" dirty="0">
                 <a:solidFill>
                   <a:srgbClr val="1C7293"/>
                 </a:solidFill>
@@ -9510,6 +9626,10 @@
             </a:outerShdw>
           </a:effectLst>
         </p:spPr>
+        <p:txBody>
+          <a:bodyPr/>
+          <a:p/>
+        </p:txBody>
       </p:sp>
       <p:sp>
         <p:nvSpPr>
@@ -9617,6 +9737,10 @@
             </a:outerShdw>
           </a:effectLst>
         </p:spPr>
+        <p:txBody>
+          <a:bodyPr/>
+          <a:p/>
+        </p:txBody>
       </p:sp>
       <p:sp>
         <p:nvSpPr>
@@ -9744,6 +9868,10 @@
             </a:outerShdw>
           </a:effectLst>
         </p:spPr>
+        <p:txBody>
+          <a:bodyPr/>
+          <a:p/>
+        </p:txBody>
       </p:sp>
       <p:sp>
         <p:nvSpPr>
@@ -9832,7 +9960,7 @@
               <a:buNone/>
             </a:pPr>
             <a:r>
-              <a:rPr lang="en-US" sz="1000" dirty="0">
+              <a:rPr lang="en-US" sz="1600" dirty="0">
                 <a:solidFill>
                   <a:srgbClr val="A0A0A0"/>
                 </a:solidFill>
@@ -9896,7 +10024,7 @@
               <a:buNone/>
             </a:pPr>
             <a:r>
-              <a:rPr lang="en-US" sz="1300" b="1" spc="200" kern="0" dirty="0">
+              <a:rPr lang="en-US" sz="1600" b="1" spc="200" kern="0" dirty="0">
                 <a:solidFill>
                   <a:srgbClr val="1C7293"/>
                 </a:solidFill>
@@ -9970,6 +10098,10 @@
           </a:solidFill>
           <a:ln/>
         </p:spPr>
+        <p:txBody>
+          <a:bodyPr/>
+          <a:p/>
+        </p:txBody>
       </p:sp>
       <p:sp>
         <p:nvSpPr>
@@ -10035,7 +10167,7 @@
               <a:buNone/>
             </a:pPr>
             <a:r>
-              <a:rPr lang="en-US" sz="1300" dirty="0">
+              <a:rPr lang="en-US" sz="1600" dirty="0">
                 <a:solidFill>
                   <a:srgbClr val="FFFFFF"/>
                 </a:solidFill>
@@ -10070,6 +10202,10 @@
           </a:solidFill>
           <a:ln/>
         </p:spPr>
+        <p:txBody>
+          <a:bodyPr/>
+          <a:p/>
+        </p:txBody>
       </p:sp>
       <p:sp>
         <p:nvSpPr>
@@ -10135,7 +10271,7 @@
               <a:buNone/>
             </a:pPr>
             <a:r>
-              <a:rPr lang="en-US" sz="1300" dirty="0">
+              <a:rPr lang="en-US" sz="1600" dirty="0">
                 <a:solidFill>
                   <a:srgbClr val="FFFFFF"/>
                 </a:solidFill>
@@ -10170,6 +10306,10 @@
           </a:solidFill>
           <a:ln/>
         </p:spPr>
+        <p:txBody>
+          <a:bodyPr/>
+          <a:p/>
+        </p:txBody>
       </p:sp>
       <p:sp>
         <p:nvSpPr>
@@ -10235,7 +10375,7 @@
               <a:buNone/>
             </a:pPr>
             <a:r>
-              <a:rPr lang="en-US" sz="1300" dirty="0">
+              <a:rPr lang="en-US" sz="1600" dirty="0">
                 <a:solidFill>
                   <a:srgbClr val="FFFFFF"/>
                 </a:solidFill>
@@ -10274,7 +10414,7 @@
               <a:buNone/>
             </a:pPr>
             <a:r>
-              <a:rPr lang="en-US" sz="1250" i="1" dirty="0">
+              <a:rPr lang="en-US" sz="1600" i="1" dirty="0">
                 <a:solidFill>
                   <a:srgbClr val="52514E"/>
                 </a:solidFill>
@@ -10307,6 +10447,10 @@
           </a:solidFill>
           <a:ln/>
         </p:spPr>
+        <p:txBody>
+          <a:bodyPr/>
+          <a:p/>
+        </p:txBody>
       </p:sp>
       <p:sp>
         <p:nvSpPr>
@@ -10333,7 +10477,7 @@
               <a:buNone/>
             </a:pPr>
             <a:r>
-              <a:rPr lang="en-US" sz="1350" dirty="0">
+              <a:rPr lang="en-US" sz="1600" dirty="0">
                 <a:solidFill>
                   <a:srgbClr val="232323"/>
                 </a:solidFill>
@@ -10366,6 +10510,10 @@
           </a:solidFill>
           <a:ln/>
         </p:spPr>
+        <p:txBody>
+          <a:bodyPr/>
+          <a:p/>
+        </p:txBody>
       </p:sp>
       <p:sp>
         <p:nvSpPr>
@@ -10392,7 +10540,7 @@
               <a:buNone/>
             </a:pPr>
             <a:r>
-              <a:rPr lang="en-US" sz="1350" dirty="0">
+              <a:rPr lang="en-US" sz="1600" dirty="0">
                 <a:solidFill>
                   <a:srgbClr val="232323"/>
                 </a:solidFill>
@@ -10425,6 +10573,10 @@
           </a:solidFill>
           <a:ln/>
         </p:spPr>
+        <p:txBody>
+          <a:bodyPr/>
+          <a:p/>
+        </p:txBody>
       </p:sp>
       <p:sp>
         <p:nvSpPr>
@@ -10451,7 +10603,7 @@
               <a:buNone/>
             </a:pPr>
             <a:r>
-              <a:rPr lang="en-US" sz="1350" dirty="0">
+              <a:rPr lang="en-US" sz="1600" dirty="0">
                 <a:solidFill>
                   <a:srgbClr val="232323"/>
                 </a:solidFill>
@@ -10484,6 +10636,10 @@
           </a:solidFill>
           <a:ln/>
         </p:spPr>
+        <p:txBody>
+          <a:bodyPr/>
+          <a:p/>
+        </p:txBody>
       </p:sp>
       <p:sp>
         <p:nvSpPr>
@@ -10510,7 +10666,7 @@
               <a:buNone/>
             </a:pPr>
             <a:r>
-              <a:rPr lang="en-US" sz="1350" dirty="0">
+              <a:rPr lang="en-US" sz="1600" dirty="0">
                 <a:solidFill>
                   <a:srgbClr val="232323"/>
                 </a:solidFill>
@@ -10549,7 +10705,7 @@
               <a:buNone/>
             </a:pPr>
             <a:r>
-              <a:rPr lang="en-US" sz="1000" dirty="0">
+              <a:rPr lang="en-US" sz="1600" dirty="0">
                 <a:solidFill>
                   <a:srgbClr val="A0A0A0"/>
                 </a:solidFill>
@@ -10613,7 +10769,7 @@
               <a:buNone/>
             </a:pPr>
             <a:r>
-              <a:rPr lang="en-US" sz="1300" b="1" spc="200" kern="0" dirty="0">
+              <a:rPr lang="en-US" sz="1600" b="1" spc="200" kern="0" dirty="0">
                 <a:solidFill>
                   <a:srgbClr val="1C7293"/>
                 </a:solidFill>
@@ -10699,6 +10855,10 @@
             </a:outerShdw>
           </a:effectLst>
         </p:spPr>
+        <p:txBody>
+          <a:bodyPr/>
+          <a:p/>
+        </p:txBody>
       </p:sp>
       <p:sp>
         <p:nvSpPr>
@@ -10725,7 +10885,7 @@
               <a:buNone/>
             </a:pPr>
             <a:r>
-              <a:rPr lang="en-US" sz="1300" b="1" dirty="0">
+              <a:rPr lang="en-US" sz="1600" b="1" dirty="0">
                 <a:solidFill>
                   <a:srgbClr val="D03B3B"/>
                 </a:solidFill>
@@ -10806,7 +10966,7 @@
               <a:buNone/>
             </a:pPr>
             <a:r>
-              <a:rPr lang="en-US" sz="1300" dirty="0">
+              <a:rPr lang="en-US" sz="1600" dirty="0">
                 <a:solidFill>
                   <a:srgbClr val="52514E"/>
                 </a:solidFill>
@@ -10826,7 +10986,7 @@
               <a:buNone/>
             </a:pPr>
             <a:r>
-              <a:rPr lang="en-US" sz="1300" dirty="0">
+              <a:rPr lang="en-US" sz="1600" dirty="0">
                 <a:solidFill>
                   <a:srgbClr val="52514E"/>
                 </a:solidFill>
@@ -10873,6 +11033,10 @@
             </a:outerShdw>
           </a:effectLst>
         </p:spPr>
+        <p:txBody>
+          <a:bodyPr/>
+          <a:p/>
+        </p:txBody>
       </p:sp>
       <p:sp>
         <p:nvSpPr>
@@ -10899,7 +11063,7 @@
               <a:buNone/>
             </a:pPr>
             <a:r>
-              <a:rPr lang="en-US" sz="1300" b="1" dirty="0">
+              <a:rPr lang="en-US" sz="1600" b="1" dirty="0">
                 <a:solidFill>
                   <a:srgbClr val="D03B3B"/>
                 </a:solidFill>
@@ -10980,7 +11144,7 @@
               <a:buNone/>
             </a:pPr>
             <a:r>
-              <a:rPr lang="en-US" sz="1300" dirty="0">
+              <a:rPr lang="en-US" sz="1600" dirty="0">
                 <a:solidFill>
                   <a:srgbClr val="52514E"/>
                 </a:solidFill>
@@ -11000,7 +11164,7 @@
               <a:buNone/>
             </a:pPr>
             <a:r>
-              <a:rPr lang="en-US" sz="1300" dirty="0">
+              <a:rPr lang="en-US" sz="1600" dirty="0">
                 <a:solidFill>
                   <a:srgbClr val="52514E"/>
                 </a:solidFill>
@@ -11047,6 +11211,10 @@
             </a:outerShdw>
           </a:effectLst>
         </p:spPr>
+        <p:txBody>
+          <a:bodyPr/>
+          <a:p/>
+        </p:txBody>
       </p:sp>
       <p:sp>
         <p:nvSpPr>
@@ -11073,7 +11241,7 @@
               <a:buNone/>
             </a:pPr>
             <a:r>
-              <a:rPr lang="en-US" sz="1300" b="1" dirty="0">
+              <a:rPr lang="en-US" sz="1600" b="1" dirty="0">
                 <a:solidFill>
                   <a:srgbClr val="CADCFC"/>
                 </a:solidFill>
@@ -11154,7 +11322,7 @@
               <a:buNone/>
             </a:pPr>
             <a:r>
-              <a:rPr lang="en-US" sz="1300" dirty="0">
+              <a:rPr lang="en-US" sz="1600" dirty="0">
                 <a:solidFill>
                   <a:srgbClr val="FFFFFF"/>
                 </a:solidFill>
@@ -11174,7 +11342,7 @@
               <a:buNone/>
             </a:pPr>
             <a:r>
-              <a:rPr lang="en-US" sz="1300" dirty="0">
+              <a:rPr lang="en-US" sz="1600" dirty="0">
                 <a:solidFill>
                   <a:srgbClr val="FFFFFF"/>
                 </a:solidFill>
@@ -11213,7 +11381,7 @@
               <a:buNone/>
             </a:pPr>
             <a:r>
-              <a:rPr lang="en-US" sz="1000" dirty="0">
+              <a:rPr lang="en-US" sz="1600" dirty="0">
                 <a:solidFill>
                   <a:srgbClr val="A0A0A0"/>
                 </a:solidFill>
@@ -11277,7 +11445,7 @@
               <a:buNone/>
             </a:pPr>
             <a:r>
-              <a:rPr lang="en-US" sz="1300" b="1" spc="200" kern="0" dirty="0">
+              <a:rPr lang="en-US" sz="1600" b="1" spc="200" kern="0" dirty="0">
                 <a:solidFill>
                   <a:srgbClr val="1C7293"/>
                 </a:solidFill>
@@ -11379,7 +11547,7 @@
               <a:buNone/>
             </a:pPr>
             <a:r>
-              <a:rPr lang="en-US" sz="1000" dirty="0">
+              <a:rPr lang="en-US" sz="1600" dirty="0">
                 <a:solidFill>
                   <a:srgbClr val="A0A0A0"/>
                 </a:solidFill>
@@ -11443,7 +11611,7 @@
               <a:buNone/>
             </a:pPr>
             <a:r>
-              <a:rPr lang="en-US" sz="1300" b="1" spc="200" kern="0" dirty="0">
+              <a:rPr lang="en-US" sz="1600" b="1" spc="200" kern="0" dirty="0">
                 <a:solidFill>
                   <a:srgbClr val="1C7293"/>
                 </a:solidFill>
@@ -11521,7 +11689,7 @@
               <a:buNone/>
             </a:pPr>
             <a:r>
-              <a:rPr lang="en-US" sz="1350" i="1" dirty="0">
+              <a:rPr lang="en-US" sz="1600" i="1" dirty="0">
                 <a:solidFill>
                   <a:srgbClr val="1C7293"/>
                 </a:solidFill>
@@ -11568,6 +11736,10 @@
             </a:outerShdw>
           </a:effectLst>
         </p:spPr>
+        <p:txBody>
+          <a:bodyPr/>
+          <a:p/>
+        </p:txBody>
       </p:sp>
       <p:sp>
         <p:nvSpPr>
@@ -11588,6 +11760,10 @@
           </a:solidFill>
           <a:ln/>
         </p:spPr>
+        <p:txBody>
+          <a:bodyPr/>
+          <a:p/>
+        </p:txBody>
       </p:sp>
       <p:sp>
         <p:nvSpPr>
@@ -11650,7 +11826,7 @@
               <a:buNone/>
             </a:pPr>
             <a:r>
-              <a:rPr lang="en-US" sz="1450" b="1" dirty="0">
+              <a:rPr lang="en-US" sz="1600" b="1" dirty="0">
                 <a:solidFill>
                   <a:srgbClr val="132747"/>
                 </a:solidFill>
@@ -11692,7 +11868,7 @@
               <a:buNone/>
             </a:pPr>
             <a:r>
-              <a:rPr lang="en-US" sz="1080" dirty="0">
+              <a:rPr lang="en-US" sz="1600" dirty="0">
                 <a:solidFill>
                   <a:srgbClr val="52514E"/>
                 </a:solidFill>
@@ -11739,6 +11915,10 @@
             </a:outerShdw>
           </a:effectLst>
         </p:spPr>
+        <p:txBody>
+          <a:bodyPr/>
+          <a:p/>
+        </p:txBody>
       </p:sp>
       <p:sp>
         <p:nvSpPr>
@@ -11759,6 +11939,10 @@
           </a:solidFill>
           <a:ln/>
         </p:spPr>
+        <p:txBody>
+          <a:bodyPr/>
+          <a:p/>
+        </p:txBody>
       </p:sp>
       <p:sp>
         <p:nvSpPr>
@@ -11821,7 +12005,7 @@
               <a:buNone/>
             </a:pPr>
             <a:r>
-              <a:rPr lang="en-US" sz="1450" b="1" dirty="0">
+              <a:rPr lang="en-US" sz="1600" b="1" dirty="0">
                 <a:solidFill>
                   <a:srgbClr val="132747"/>
                 </a:solidFill>
@@ -11863,7 +12047,7 @@
               <a:buNone/>
             </a:pPr>
             <a:r>
-              <a:rPr lang="en-US" sz="1080" dirty="0">
+              <a:rPr lang="en-US" sz="1600" dirty="0">
                 <a:solidFill>
                   <a:srgbClr val="52514E"/>
                 </a:solidFill>
@@ -11910,6 +12094,10 @@
             </a:outerShdw>
           </a:effectLst>
         </p:spPr>
+        <p:txBody>
+          <a:bodyPr/>
+          <a:p/>
+        </p:txBody>
       </p:sp>
       <p:sp>
         <p:nvSpPr>
@@ -11930,6 +12118,10 @@
           </a:solidFill>
           <a:ln/>
         </p:spPr>
+        <p:txBody>
+          <a:bodyPr/>
+          <a:p/>
+        </p:txBody>
       </p:sp>
       <p:sp>
         <p:nvSpPr>
@@ -11992,7 +12184,7 @@
               <a:buNone/>
             </a:pPr>
             <a:r>
-              <a:rPr lang="en-US" sz="1450" b="1" dirty="0">
+              <a:rPr lang="en-US" sz="1600" b="1" dirty="0">
                 <a:solidFill>
                   <a:srgbClr val="132747"/>
                 </a:solidFill>
@@ -12034,7 +12226,7 @@
               <a:buNone/>
             </a:pPr>
             <a:r>
-              <a:rPr lang="en-US" sz="1080" dirty="0">
+              <a:rPr lang="en-US" sz="1600" dirty="0">
                 <a:solidFill>
                   <a:srgbClr val="52514E"/>
                 </a:solidFill>
@@ -12081,6 +12273,10 @@
             </a:outerShdw>
           </a:effectLst>
         </p:spPr>
+        <p:txBody>
+          <a:bodyPr/>
+          <a:p/>
+        </p:txBody>
       </p:sp>
       <p:sp>
         <p:nvSpPr>
@@ -12101,6 +12297,10 @@
           </a:solidFill>
           <a:ln/>
         </p:spPr>
+        <p:txBody>
+          <a:bodyPr/>
+          <a:p/>
+        </p:txBody>
       </p:sp>
       <p:sp>
         <p:nvSpPr>
@@ -12163,7 +12363,7 @@
               <a:buNone/>
             </a:pPr>
             <a:r>
-              <a:rPr lang="en-US" sz="1450" b="1" dirty="0">
+              <a:rPr lang="en-US" sz="1600" b="1" dirty="0">
                 <a:solidFill>
                   <a:srgbClr val="132747"/>
                 </a:solidFill>
@@ -12205,7 +12405,7 @@
               <a:buNone/>
             </a:pPr>
             <a:r>
-              <a:rPr lang="en-US" sz="1080" dirty="0">
+              <a:rPr lang="en-US" sz="1600" dirty="0">
                 <a:solidFill>
                   <a:srgbClr val="52514E"/>
                 </a:solidFill>
@@ -12252,6 +12452,10 @@
             </a:outerShdw>
           </a:effectLst>
         </p:spPr>
+        <p:txBody>
+          <a:bodyPr/>
+          <a:p/>
+        </p:txBody>
       </p:sp>
       <p:sp>
         <p:nvSpPr>
@@ -12272,6 +12476,10 @@
           </a:solidFill>
           <a:ln/>
         </p:spPr>
+        <p:txBody>
+          <a:bodyPr/>
+          <a:p/>
+        </p:txBody>
       </p:sp>
       <p:sp>
         <p:nvSpPr>
@@ -12334,7 +12542,7 @@
               <a:buNone/>
             </a:pPr>
             <a:r>
-              <a:rPr lang="en-US" sz="1450" b="1" dirty="0">
+              <a:rPr lang="en-US" sz="1600" b="1" dirty="0">
                 <a:solidFill>
                   <a:srgbClr val="132747"/>
                 </a:solidFill>
@@ -12376,7 +12584,7 @@
               <a:buNone/>
             </a:pPr>
             <a:r>
-              <a:rPr lang="en-US" sz="1080" dirty="0">
+              <a:rPr lang="en-US" sz="1600" dirty="0">
                 <a:solidFill>
                   <a:srgbClr val="52514E"/>
                 </a:solidFill>
@@ -12415,7 +12623,7 @@
               <a:buNone/>
             </a:pPr>
             <a:r>
-              <a:rPr lang="en-US" sz="1000" dirty="0">
+              <a:rPr lang="en-US" sz="1600" dirty="0">
                 <a:solidFill>
                   <a:srgbClr val="A0A0A0"/>
                 </a:solidFill>
@@ -12479,7 +12687,7 @@
               <a:buNone/>
             </a:pPr>
             <a:r>
-              <a:rPr lang="en-US" sz="1300" b="1" spc="200" kern="0" dirty="0">
+              <a:rPr lang="en-US" sz="1600" b="1" spc="200" kern="0" dirty="0">
                 <a:solidFill>
                   <a:srgbClr val="CADCFC"/>
                 </a:solidFill>
@@ -12558,6 +12766,10 @@
             <a:prstDash val="solid"/>
           </a:ln>
         </p:spPr>
+        <p:txBody>
+          <a:bodyPr/>
+          <a:p/>
+        </p:txBody>
       </p:sp>
       <p:sp>
         <p:nvSpPr>
@@ -12578,6 +12790,10 @@
           </a:solidFill>
           <a:ln/>
         </p:spPr>
+        <p:txBody>
+          <a:bodyPr/>
+          <a:p/>
+        </p:txBody>
       </p:sp>
       <p:sp>
         <p:nvSpPr>
@@ -12643,7 +12859,7 @@
               <a:buNone/>
             </a:pPr>
             <a:r>
-              <a:rPr lang="en-US" sz="1550" b="1" dirty="0">
+              <a:rPr lang="en-US" sz="1600" b="1" dirty="0">
                 <a:solidFill>
                   <a:srgbClr val="CADCFC"/>
                 </a:solidFill>
@@ -12651,7 +12867,7 @@
                 <a:ea typeface="Cambria" pitchFamily="34" charset="-122"/>
                 <a:cs typeface="Cambria" pitchFamily="34" charset="-120"/>
               </a:rPr>
-              <a:t>Fuzzification</a:t>
+              <a:t>Mờ hóa (Fuzzification)</a:t>
             </a:r>
             <a:endParaRPr lang="en-US" sz="1550" dirty="0"/>
           </a:p>
@@ -12685,7 +12901,7 @@
               <a:buNone/>
             </a:pPr>
             <a:r>
-              <a:rPr lang="en-US" sz="1180" dirty="0">
+              <a:rPr lang="en-US" sz="1600" dirty="0">
                 <a:solidFill>
                   <a:srgbClr val="D6DEEB"/>
                 </a:solidFill>
@@ -12705,7 +12921,7 @@
               <a:buNone/>
             </a:pPr>
             <a:r>
-              <a:rPr lang="en-US" sz="1180" dirty="0">
+              <a:rPr lang="en-US" sz="1600" dirty="0">
                 <a:solidFill>
                   <a:srgbClr val="D6DEEB"/>
                 </a:solidFill>
@@ -12781,6 +12997,10 @@
             <a:prstDash val="solid"/>
           </a:ln>
         </p:spPr>
+        <p:txBody>
+          <a:bodyPr/>
+          <a:p/>
+        </p:txBody>
       </p:sp>
       <p:sp>
         <p:nvSpPr>
@@ -12801,6 +13021,10 @@
           </a:solidFill>
           <a:ln/>
         </p:spPr>
+        <p:txBody>
+          <a:bodyPr/>
+          <a:p/>
+        </p:txBody>
       </p:sp>
       <p:sp>
         <p:nvSpPr>
@@ -12866,7 +13090,7 @@
               <a:buNone/>
             </a:pPr>
             <a:r>
-              <a:rPr lang="en-US" sz="1550" b="1" dirty="0">
+              <a:rPr lang="en-US" sz="1600" b="1" dirty="0">
                 <a:solidFill>
                   <a:srgbClr val="CADCFC"/>
                 </a:solidFill>
@@ -12874,7 +13098,7 @@
                 <a:ea typeface="Cambria" pitchFamily="34" charset="-122"/>
                 <a:cs typeface="Cambria" pitchFamily="34" charset="-120"/>
               </a:rPr>
-              <a:t>Rule Evaluation</a:t>
+              <a:t>Đánh giá luật (Rule Evaluation)</a:t>
             </a:r>
             <a:endParaRPr lang="en-US" sz="1550" dirty="0"/>
           </a:p>
@@ -12908,7 +13132,7 @@
               <a:buNone/>
             </a:pPr>
             <a:r>
-              <a:rPr lang="en-US" sz="1180" dirty="0">
+              <a:rPr lang="en-US" sz="1600" dirty="0">
                 <a:solidFill>
                   <a:srgbClr val="D6DEEB"/>
                 </a:solidFill>
@@ -12928,7 +13152,7 @@
               <a:buNone/>
             </a:pPr>
             <a:r>
-              <a:rPr lang="en-US" sz="1180" dirty="0">
+              <a:rPr lang="en-US" sz="1600" dirty="0">
                 <a:solidFill>
                   <a:srgbClr val="D6DEEB"/>
                 </a:solidFill>
@@ -13004,6 +13228,10 @@
             <a:prstDash val="solid"/>
           </a:ln>
         </p:spPr>
+        <p:txBody>
+          <a:bodyPr/>
+          <a:p/>
+        </p:txBody>
       </p:sp>
       <p:sp>
         <p:nvSpPr>
@@ -13024,6 +13252,10 @@
           </a:solidFill>
           <a:ln/>
         </p:spPr>
+        <p:txBody>
+          <a:bodyPr/>
+          <a:p/>
+        </p:txBody>
       </p:sp>
       <p:sp>
         <p:nvSpPr>
@@ -13089,7 +13321,7 @@
               <a:buNone/>
             </a:pPr>
             <a:r>
-              <a:rPr lang="en-US" sz="1550" b="1" dirty="0">
+              <a:rPr lang="en-US" sz="1600" b="1" dirty="0">
                 <a:solidFill>
                   <a:srgbClr val="CADCFC"/>
                 </a:solidFill>
@@ -13097,7 +13329,7 @@
                 <a:ea typeface="Cambria" pitchFamily="34" charset="-122"/>
                 <a:cs typeface="Cambria" pitchFamily="34" charset="-120"/>
               </a:rPr>
-              <a:t>Aggregation</a:t>
+              <a:t>Gộp mờ (Aggregation)</a:t>
             </a:r>
             <a:endParaRPr lang="en-US" sz="1550" dirty="0"/>
           </a:p>
@@ -13131,7 +13363,7 @@
               <a:buNone/>
             </a:pPr>
             <a:r>
-              <a:rPr lang="en-US" sz="1180" dirty="0">
+              <a:rPr lang="en-US" sz="1600" dirty="0">
                 <a:solidFill>
                   <a:srgbClr val="D6DEEB"/>
                 </a:solidFill>
@@ -13151,7 +13383,7 @@
               <a:buNone/>
             </a:pPr>
             <a:r>
-              <a:rPr lang="en-US" sz="1180" dirty="0">
+              <a:rPr lang="en-US" sz="1600" dirty="0">
                 <a:solidFill>
                   <a:srgbClr val="D6DEEB"/>
                 </a:solidFill>
@@ -13227,6 +13459,10 @@
             <a:prstDash val="solid"/>
           </a:ln>
         </p:spPr>
+        <p:txBody>
+          <a:bodyPr/>
+          <a:p/>
+        </p:txBody>
       </p:sp>
       <p:sp>
         <p:nvSpPr>
@@ -13247,6 +13483,10 @@
           </a:solidFill>
           <a:ln/>
         </p:spPr>
+        <p:txBody>
+          <a:bodyPr/>
+          <a:p/>
+        </p:txBody>
       </p:sp>
       <p:sp>
         <p:nvSpPr>
@@ -13312,7 +13552,7 @@
               <a:buNone/>
             </a:pPr>
             <a:r>
-              <a:rPr lang="en-US" sz="1550" b="1" dirty="0">
+              <a:rPr lang="en-US" sz="1600" b="1" dirty="0">
                 <a:solidFill>
                   <a:srgbClr val="CADCFC"/>
                 </a:solidFill>
@@ -13320,7 +13560,7 @@
                 <a:ea typeface="Cambria" pitchFamily="34" charset="-122"/>
                 <a:cs typeface="Cambria" pitchFamily="34" charset="-120"/>
               </a:rPr>
-              <a:t>Defuzzification</a:t>
+              <a:t>Giải mờ (Defuzzification)</a:t>
             </a:r>
             <a:endParaRPr lang="en-US" sz="1550" dirty="0"/>
           </a:p>
@@ -13354,7 +13594,7 @@
               <a:buNone/>
             </a:pPr>
             <a:r>
-              <a:rPr lang="en-US" sz="1180" dirty="0">
+              <a:rPr lang="en-US" sz="1600" dirty="0">
                 <a:solidFill>
                   <a:srgbClr val="D6DEEB"/>
                 </a:solidFill>
@@ -13374,7 +13614,7 @@
               <a:buNone/>
             </a:pPr>
             <a:r>
-              <a:rPr lang="en-US" sz="1180" dirty="0">
+              <a:rPr lang="en-US" sz="1600" dirty="0">
                 <a:solidFill>
                   <a:srgbClr val="D6DEEB"/>
                 </a:solidFill>
@@ -13413,7 +13653,7 @@
               <a:buNone/>
             </a:pPr>
             <a:r>
-              <a:rPr lang="en-US" sz="1000" dirty="0">
+              <a:rPr lang="en-US" sz="1600" dirty="0">
                 <a:solidFill>
                   <a:srgbClr val="8FA3C7"/>
                 </a:solidFill>
@@ -13477,7 +13717,7 @@
               <a:buNone/>
             </a:pPr>
             <a:r>
-              <a:rPr lang="en-US" sz="1300" b="1" spc="200" kern="0" dirty="0">
+              <a:rPr lang="en-US" sz="1600" b="1" spc="200" kern="0" dirty="0">
                 <a:solidFill>
                   <a:srgbClr val="1C7293"/>
                 </a:solidFill>
@@ -13579,7 +13819,7 @@
               <a:buNone/>
             </a:pPr>
             <a:r>
-              <a:rPr lang="en-US" sz="1000" dirty="0">
+              <a:rPr lang="en-US" sz="1600" dirty="0">
                 <a:solidFill>
                   <a:srgbClr val="A0A0A0"/>
                 </a:solidFill>
